--- a/Report and PPT/COOP-II PPT - 2210991853.pptx
+++ b/Report and PPT/COOP-II PPT - 2210991853.pptx
@@ -142,7 +142,7 @@
           <a:p>
             <a:fld id="{1E4FBE07-60F8-46B3-92B2-F4D6484FD391}" type="datetimeFigureOut">
               <a:rPr lang="en-IN" smtClean="0"/>
-              <a:t>03-05-2026</a:t>
+              <a:t>19-05-2026</a:t>
             </a:fld>
             <a:endParaRPr lang="en-IN"/>
           </a:p>
@@ -323,7 +323,7 @@
           <a:p>
             <a:fld id="{4DDB21EC-96E4-4A6B-A105-466CE17E3E59}" type="datetimeFigureOut">
               <a:rPr lang="en-IN" smtClean="0"/>
-              <a:t>03-05-2026</a:t>
+              <a:t>19-05-2026</a:t>
             </a:fld>
             <a:endParaRPr lang="en-IN"/>
           </a:p>
@@ -746,7 +746,7 @@
           <a:p>
             <a:fld id="{1D8BD707-D9CF-40AE-B4C6-C98DA3205C09}" type="datetimeFigureOut">
               <a:rPr lang="en-US"/>
-              <a:t>5/3/2026</a:t>
+              <a:t>5/19/2026</a:t>
             </a:fld>
             <a:endParaRPr lang="en-US"/>
           </a:p>
@@ -929,7 +929,7 @@
           <a:p>
             <a:fld id="{1D8BD707-D9CF-40AE-B4C6-C98DA3205C09}" type="datetimeFigureOut">
               <a:rPr lang="en-US"/>
-              <a:t>5/3/2026</a:t>
+              <a:t>5/19/2026</a:t>
             </a:fld>
             <a:endParaRPr lang="en-US"/>
           </a:p>
@@ -1149,7 +1149,7 @@
           <a:p>
             <a:fld id="{1D8BD707-D9CF-40AE-B4C6-C98DA3205C09}" type="datetimeFigureOut">
               <a:rPr lang="en-US"/>
-              <a:t>5/3/2026</a:t>
+              <a:t>5/19/2026</a:t>
             </a:fld>
             <a:endParaRPr lang="en-US"/>
           </a:p>
@@ -1303,7 +1303,7 @@
           <a:p>
             <a:fld id="{1D8BD707-D9CF-40AE-B4C6-C98DA3205C09}" type="datetimeFigureOut">
               <a:rPr lang="en-US"/>
-              <a:t>5/3/2026</a:t>
+              <a:t>5/19/2026</a:t>
             </a:fld>
             <a:endParaRPr lang="en-US"/>
           </a:p>
@@ -1428,7 +1428,7 @@
           <a:p>
             <a:fld id="{1D8BD707-D9CF-40AE-B4C6-C98DA3205C09}" type="datetimeFigureOut">
               <a:rPr lang="en-US"/>
-              <a:t>5/3/2026</a:t>
+              <a:t>5/19/2026</a:t>
             </a:fld>
             <a:endParaRPr lang="en-US"/>
           </a:p>
@@ -1941,7 +1941,7 @@
           <a:p>
             <a:fld id="{1D8BD707-D9CF-40AE-B4C6-C98DA3205C09}" type="datetimeFigureOut">
               <a:rPr lang="en-US"/>
-              <a:t>5/3/2026</a:t>
+              <a:t>5/19/2026</a:t>
             </a:fld>
             <a:endParaRPr lang="en-US"/>
           </a:p>
@@ -4433,44 +4433,11 @@
           <a:p>
             <a:pPr marL="12700" marR="5080">
               <a:lnSpc>
-                <a:spcPct val="150000"/>
+                <a:spcPct val="101000"/>
               </a:lnSpc>
               <a:spcBef>
                 <a:spcPts val="100"/>
               </a:spcBef>
-            </a:pPr>
-            <a:r>
-              <a:rPr lang="en-US" altLang="en-US" b="0" dirty="0">
-                <a:latin typeface="Times New Roman" panose="02020603050405020304"/>
-                <a:cs typeface="Times New Roman" panose="02020603050405020304"/>
-              </a:rPr>
-              <a:t>Note: The implementation uses a simulated dataset due to computational constraints. The reported   92.4% accuracy corresponds to results from benchmark datasets (</a:t>
-            </a:r>
-            <a:r>
-              <a:rPr lang="en-US" altLang="en-US" b="0" dirty="0" err="1">
-                <a:latin typeface="Times New Roman" panose="02020603050405020304"/>
-                <a:cs typeface="Times New Roman" panose="02020603050405020304"/>
-              </a:rPr>
-              <a:t>FaceForensics</a:t>
-            </a:r>
-            <a:r>
-              <a:rPr lang="en-US" altLang="en-US" b="0" dirty="0">
-                <a:latin typeface="Times New Roman" panose="02020603050405020304"/>
-                <a:cs typeface="Times New Roman" panose="02020603050405020304"/>
-              </a:rPr>
-              <a:t>++ and DFDC) as presented in the research paper.</a:t>
-            </a:r>
-          </a:p>
-          <a:p>
-            <a:pPr marL="469900" marR="5080" indent="-457200">
-              <a:lnSpc>
-                <a:spcPct val="101000"/>
-              </a:lnSpc>
-              <a:spcBef>
-                <a:spcPts val="100"/>
-              </a:spcBef>
-              <a:buFont typeface="Wingdings" panose="05000000000000000000" charset="0"/>
-              <a:buChar char="Ø"/>
             </a:pPr>
             <a:endParaRPr lang="en-US" altLang="en-US" sz="2400" b="0" dirty="0">
               <a:latin typeface="Times New Roman" panose="02020603050405020304"/>
@@ -4533,8 +4500,8 @@
         </p:blipFill>
         <p:spPr>
           <a:xfrm>
-            <a:off x="2057400" y="4267200"/>
-            <a:ext cx="5562600" cy="2895600"/>
+            <a:off x="1371600" y="3505200"/>
+            <a:ext cx="6587289" cy="3429000"/>
           </a:xfrm>
           <a:prstGeom prst="rect">
             <a:avLst/>
